--- a/hikes/slides/glacier-hikes.pptx
+++ b/hikes/slides/glacier-hikes.pptx
@@ -507,7 +507,7 @@
           <a:p>
             <a:r>
               <a:rPr lang="en-US" dirty="0"/>
-              <a:t>Three hiking days in Glacier. Day 2 is the only one with a real choice to make, and the only one that depends on the shuttle.</a:t>
+              <a:t>Three hiking days in Glacier. Day 2 splits into two groups and is the only day that depends on the shuttle.</a:t>
             </a:r>
             <a:endParaRPr lang="en-US" dirty="0"/>
           </a:p>
@@ -595,7 +595,7 @@
           <a:p>
             <a:r>
               <a:rPr lang="en-US" dirty="0"/>
-              <a:t>Day 2 is the one to plan around — it depends on shuttle timing.</a:t>
+              <a:t>Day 2 is the one to plan around, because it depends on shuttle timing.</a:t>
             </a:r>
             <a:endParaRPr lang="en-US" dirty="0"/>
           </a:p>
@@ -771,7 +771,7 @@
           <a:p>
             <a:r>
               <a:rPr lang="en-US" dirty="0"/>
-              <a:t>Highline Trail or Hidden Lake — two options · both start at logan pass.</a:t>
+              <a:t>Summit Group &amp; Lakes Group — two groups · both start at logan pass.</a:t>
             </a:r>
             <a:endParaRPr lang="en-US" dirty="0"/>
           </a:p>
@@ -859,7 +859,7 @@
           <a:p>
             <a:r>
               <a:rPr lang="en-US" dirty="0"/>
-              <a:t>Grinnell Glacier &amp; Grinnell Lake — one trail system · turn around any time.</a:t>
+              <a:t>Grinnell Glacier &amp; Grinnell Lake — out &amp; back · turn around any time.</a:t>
             </a:r>
             <a:endParaRPr lang="en-US" dirty="0"/>
           </a:p>
@@ -947,7 +947,7 @@
           <a:p>
             <a:r>
               <a:rPr lang="en-US" dirty="0"/>
-              <a:t>Day 2 is the only one where the car is left behind. Everything there hangs on the last westbound shuttle from The Loop.</a:t>
+              <a:t>Day 2 is the only day the car is left behind, and it depends on the last westbound shuttle from The Loop.</a:t>
             </a:r>
             <a:endParaRPr lang="en-US" dirty="0"/>
           </a:p>
@@ -1454,7 +1454,7 @@
                 <a:ea typeface="Arial" pitchFamily="34" charset="-122"/>
                 <a:cs typeface="Arial" pitchFamily="34" charset="-120"/>
               </a:rPr>
-              <a:t>Avalanche Lake  ·  Highline Trail or Hidden Lake  ·  Grinnell Glacier</a:t>
+              <a:t>Tuesday 25 to Thursday 27 August  ·  Avalanche Lake, Logan Pass, Many Glacier</a:t>
             </a:r>
             <a:endParaRPr lang="en-US" sz="1500" dirty="0"/>
           </a:p>
@@ -1772,7 +1772,7 @@
                 <a:ea typeface="Arial" pitchFamily="34" charset="-122"/>
                 <a:cs typeface="Arial" pitchFamily="34" charset="-120"/>
               </a:rPr>
-              <a:t>Highline Trail or Hidden Lake</a:t>
+              <a:t>Summit Group &amp; Lakes Group</a:t>
             </a:r>
             <a:endParaRPr lang="en-US" sz="1350" dirty="0"/>
           </a:p>
@@ -2239,7 +2239,7 @@
                 <a:ea typeface="Arial" pitchFamily="34" charset="-122"/>
                 <a:cs typeface="Arial" pitchFamily="34" charset="-120"/>
               </a:rPr>
-              <a:t>Lake McDonald Valley</a:t>
+              <a:t>Tuesday 25 · Lake McDonald Valley</a:t>
             </a:r>
             <a:endParaRPr lang="en-US" sz="1100" dirty="0"/>
           </a:p>
@@ -2437,7 +2437,7 @@
                 <a:ea typeface="Arial" pitchFamily="34" charset="-122"/>
                 <a:cs typeface="Arial" pitchFamily="34" charset="-120"/>
               </a:rPr>
-              <a:t>One trail, one decision: stop at the foot of the lake or walk the shore to the head.</a:t>
+              <a:t>Stop at the foot of the lake, or keep going along the shore to the head for another 0.65 mi each way.</a:t>
             </a:r>
             <a:endParaRPr lang="en-US" sz="1150" dirty="0"/>
           </a:p>
@@ -2535,7 +2535,7 @@
                 <a:ea typeface="Arial" pitchFamily="34" charset="-122"/>
                 <a:cs typeface="Arial" pitchFamily="34" charset="-120"/>
               </a:rPr>
-              <a:t>Drive there, drive back.</a:t>
+              <a:t>Drive there and back.</a:t>
             </a:r>
             <a:endParaRPr lang="en-US" sz="1150" dirty="0"/>
           </a:p>
@@ -2694,7 +2694,7 @@
                 <a:ea typeface="Arial" pitchFamily="34" charset="-122"/>
                 <a:cs typeface="Arial" pitchFamily="34" charset="-120"/>
               </a:rPr>
-              <a:t>Highline or Hidden Lake</a:t>
+              <a:t>Summit &amp; Lakes groups</a:t>
             </a:r>
             <a:endParaRPr lang="en-US" sz="1800" dirty="0"/>
           </a:p>
@@ -2733,7 +2733,7 @@
                 <a:ea typeface="Arial" pitchFamily="34" charset="-122"/>
                 <a:cs typeface="Arial" pitchFamily="34" charset="-120"/>
               </a:rPr>
-              <a:t>Logan Pass</a:t>
+              <a:t>Wednesday 26 · Logan Pass</a:t>
             </a:r>
             <a:endParaRPr lang="en-US" sz="1100" dirty="0"/>
           </a:p>
@@ -2811,7 +2811,7 @@
                 <a:ea typeface="Arial" pitchFamily="34" charset="-122"/>
                 <a:cs typeface="Arial" pitchFamily="34" charset="-120"/>
               </a:rPr>
-              <a:t>one way</a:t>
+              <a:t>summit group</a:t>
             </a:r>
             <a:endParaRPr lang="en-US" sz="1100" dirty="0"/>
           </a:p>
@@ -2850,7 +2850,7 @@
                 <a:ea typeface="Arial" pitchFamily="34" charset="-122"/>
                 <a:cs typeface="Arial" pitchFamily="34" charset="-120"/>
               </a:rPr>
-              <a:t>or 2.7 mi</a:t>
+              <a:t>2.7 mi</a:t>
             </a:r>
             <a:endParaRPr lang="en-US" sz="1600" dirty="0"/>
           </a:p>
@@ -2889,7 +2889,7 @@
                 <a:ea typeface="Arial" pitchFamily="34" charset="-122"/>
                 <a:cs typeface="Arial" pitchFamily="34" charset="-120"/>
               </a:rPr>
-              <a:t>round trip</a:t>
+              <a:t>lakes group</a:t>
             </a:r>
             <a:endParaRPr lang="en-US" sz="1100" dirty="0"/>
           </a:p>
@@ -2931,7 +2931,7 @@
                 <a:ea typeface="Arial" pitchFamily="34" charset="-122"/>
                 <a:cs typeface="Arial" pitchFamily="34" charset="-120"/>
               </a:rPr>
-              <a:t>The Highline ends at The Loop, not where you started. The shuttle is what makes it possible.</a:t>
+              <a:t>The summit group finishes at The Loop rather than back at Logan Pass, so the shuttle has to line up.</a:t>
             </a:r>
             <a:endParaRPr lang="en-US" sz="1150" dirty="0"/>
           </a:p>
@@ -3029,7 +3029,7 @@
                 <a:ea typeface="Arial" pitchFamily="34" charset="-122"/>
                 <a:cs typeface="Arial" pitchFamily="34" charset="-120"/>
               </a:rPr>
-              <a:t>Bus and shuttle — no car.</a:t>
+              <a:t>Bus and shuttle, no car.</a:t>
             </a:r>
             <a:endParaRPr lang="en-US" sz="1150" dirty="0"/>
           </a:p>
@@ -3227,7 +3227,7 @@
                 <a:ea typeface="Arial" pitchFamily="34" charset="-122"/>
                 <a:cs typeface="Arial" pitchFamily="34" charset="-120"/>
               </a:rPr>
-              <a:t>Many Glacier</a:t>
+              <a:t>Thursday 27 · Many Glacier</a:t>
             </a:r>
             <a:endParaRPr lang="en-US" sz="1100" dirty="0"/>
           </a:p>
@@ -3425,7 +3425,7 @@
                 <a:ea typeface="Arial" pitchFamily="34" charset="-122"/>
                 <a:cs typeface="Arial" pitchFamily="34" charset="-120"/>
               </a:rPr>
-              <a:t>Out and back, so you can turn around at any viewpoint. Grinnell Lake adds a flat 1.8 mi.</a:t>
+              <a:t>Out and back, so anyone can turn around at a viewpoint. Grinnell Lake adds a flat 1.8 mi.</a:t>
             </a:r>
             <a:endParaRPr lang="en-US" sz="1150" dirty="0"/>
           </a:p>
@@ -3677,7 +3677,7 @@
                 <a:ea typeface="Arial" pitchFamily="34" charset="-122"/>
                 <a:cs typeface="Arial" pitchFamily="34" charset="-120"/>
               </a:rPr>
-              <a:t>DAY 1  ·  LAKE MCDONALD VALLEY</a:t>
+              <a:t>DAY 1  ·  TUE · AUG 25  ·  LAKE MCDONALD VALLEY</a:t>
             </a:r>
             <a:endParaRPr lang="en-US" sz="1050" dirty="0"/>
           </a:p>
@@ -4076,7 +4076,7 @@
                 <a:ea typeface="Arial" pitchFamily="34" charset="-122"/>
                 <a:cs typeface="Arial" pitchFamily="34" charset="-120"/>
               </a:rPr>
-              <a:t>A steady, forgiving climb beside Avalanche Gorge through old-growth cedar to a cirque lake with waterfalls pouring off the headwall.</a:t>
+              <a:t>An easy grade the whole way, up Avalanche Gorge through old cedar to a lake with waterfalls coming off the headwall behind it.</a:t>
             </a:r>
             <a:endParaRPr lang="en-US" sz="1200" dirty="0"/>
           </a:p>
@@ -4115,7 +4115,7 @@
                 <a:ea typeface="Arial" pitchFamily="34" charset="-122"/>
                 <a:cs typeface="Arial" pitchFamily="34" charset="-120"/>
               </a:rPr>
-              <a:t>Stopping at the foot of the lake instead makes it 4.6 mi.</a:t>
+              <a:t>Stopping at the foot of the lake makes it 4.6 mi.</a:t>
             </a:r>
             <a:endParaRPr lang="en-US" sz="1100" dirty="0"/>
           </a:p>
@@ -4378,7 +4378,7 @@
                 <a:ea typeface="Arial" pitchFamily="34" charset="-122"/>
                 <a:cs typeface="Arial" pitchFamily="34" charset="-120"/>
               </a:rPr>
-              <a:t> out and back — the car stays at the trailhead.</a:t>
+              <a:t> out and back. The car stays at the trailhead.</a:t>
             </a:r>
             <a:endParaRPr lang="en-US" sz="1150" dirty="0"/>
           </a:p>
@@ -4490,7 +4490,7 @@
                 <a:ea typeface="Arial" pitchFamily="34" charset="-122"/>
                 <a:cs typeface="Arial" pitchFamily="34" charset="-120"/>
               </a:rPr>
-              <a:t> back out the way you came.</a:t>
+              <a:t> back the way you came.</a:t>
             </a:r>
             <a:endParaRPr lang="en-US" sz="1150" dirty="0"/>
           </a:p>
@@ -4644,7 +4644,7 @@
                 <a:ea typeface="Arial" pitchFamily="34" charset="-122"/>
                 <a:cs typeface="Arial" pitchFamily="34" charset="-120"/>
               </a:rPr>
-              <a:t>DAY 2  ·  LOGAN PASS</a:t>
+              <a:t>DAY 2  ·  WED · AUG 26  ·  LOGAN PASS</a:t>
             </a:r>
             <a:endParaRPr lang="en-US" sz="1050" dirty="0"/>
           </a:p>
@@ -4686,7 +4686,7 @@
                 <a:ea typeface="Arial" pitchFamily="34" charset="-122"/>
                 <a:cs typeface="Arial" pitchFamily="34" charset="-120"/>
               </a:rPr>
-              <a:t>Highline Trail or Hidden Lake</a:t>
+              <a:t>Summit Group &amp; Lakes Group</a:t>
             </a:r>
             <a:endParaRPr lang="en-US" sz="2800" dirty="0"/>
           </a:p>
@@ -4725,7 +4725,7 @@
                 <a:ea typeface="Arial" pitchFamily="34" charset="-122"/>
                 <a:cs typeface="Arial" pitchFamily="34" charset="-120"/>
               </a:rPr>
-              <a:t>TWO OPTIONS · BOTH START AT LOGAN PASS</a:t>
+              <a:t>TWO GROUPS · BOTH START AT LOGAN PASS</a:t>
             </a:r>
             <a:endParaRPr lang="en-US" sz="950" dirty="0"/>
           </a:p>
@@ -4764,7 +4764,7 @@
                 <a:ea typeface="Arial" pitchFamily="34" charset="-122"/>
                 <a:cs typeface="Arial" pitchFamily="34" charset="-120"/>
               </a:rPr>
-              <a:t>OPTION A</a:t>
+              <a:t>SUMMIT GROUP</a:t>
             </a:r>
             <a:endParaRPr lang="en-US" sz="900" dirty="0"/>
           </a:p>
@@ -5118,7 +5118,7 @@
                 <a:ea typeface="Arial" pitchFamily="34" charset="-122"/>
                 <a:cs typeface="Arial" pitchFamily="34" charset="-120"/>
               </a:rPr>
-              <a:t>OPTION B</a:t>
+              <a:t>LAKES GROUP</a:t>
             </a:r>
             <a:endParaRPr lang="en-US" sz="900" dirty="0"/>
           </a:p>
@@ -5584,7 +5584,7 @@
                 <a:ea typeface="Arial" pitchFamily="34" charset="-122"/>
                 <a:cs typeface="Arial" pitchFamily="34" charset="-120"/>
               </a:rPr>
-              <a:t> — the car stays there all day.</a:t>
+              <a:t>. The car stays there all day.</a:t>
             </a:r>
             <a:endParaRPr lang="en-US" sz="1150" dirty="0"/>
           </a:p>
@@ -5808,7 +5808,7 @@
                 <a:ea typeface="Arial" pitchFamily="34" charset="-122"/>
                 <a:cs typeface="Arial" pitchFamily="34" charset="-120"/>
               </a:rPr>
-              <a:t> — both hikes start here.</a:t>
+              <a:t> — both groups start here and split.</a:t>
             </a:r>
             <a:endParaRPr lang="en-US" sz="1150" dirty="0"/>
           </a:p>
@@ -5920,7 +5920,7 @@
                 <a:ea typeface="Arial" pitchFamily="34" charset="-122"/>
                 <a:cs typeface="Arial" pitchFamily="34" charset="-120"/>
               </a:rPr>
-              <a:t> from The Loop (A) or Logan Pass (B).</a:t>
+              <a:t> — summit at The Loop, lakes at Logan Pass.</a:t>
             </a:r>
             <a:endParaRPr lang="en-US" sz="1150" dirty="0"/>
           </a:p>
@@ -6074,7 +6074,7 @@
                 <a:ea typeface="Arial" pitchFamily="34" charset="-122"/>
                 <a:cs typeface="Arial" pitchFamily="34" charset="-120"/>
               </a:rPr>
-              <a:t>DAY 3  ·  MANY GLACIER</a:t>
+              <a:t>DAY 3  ·  THU · AUG 27  ·  MANY GLACIER</a:t>
             </a:r>
             <a:endParaRPr lang="en-US" sz="1050" dirty="0"/>
           </a:p>
@@ -6155,7 +6155,7 @@
                 <a:ea typeface="Arial" pitchFamily="34" charset="-122"/>
                 <a:cs typeface="Arial" pitchFamily="34" charset="-120"/>
               </a:rPr>
-              <a:t>ONE TRAIL SYSTEM · TURN AROUND ANY TIME</a:t>
+              <a:t>OUT &amp; BACK · TURN AROUND ANY TIME</a:t>
             </a:r>
             <a:endParaRPr lang="en-US" sz="950" dirty="0"/>
           </a:p>
@@ -6473,7 +6473,7 @@
                 <a:ea typeface="Arial" pitchFamily="34" charset="-122"/>
                 <a:cs typeface="Arial" pitchFamily="34" charset="-120"/>
               </a:rPr>
-              <a:t>Climbs the wall above Lake Josephine to Upper Grinnell Lake, right under the glacier. Every viewpoint on the way is a fine place to stop, and the flat Grinnell Lake spur bolts onto the end.</a:t>
+              <a:t>Climbs the wall above Lake Josephine and ends at Upper Grinnell Lake, below the glacier. Good views most of the way up, so anyone can stop early and head back.</a:t>
             </a:r>
             <a:endParaRPr lang="en-US" sz="1200" dirty="0"/>
           </a:p>
@@ -6512,7 +6512,7 @@
                 <a:ea typeface="Arial" pitchFamily="34" charset="-122"/>
                 <a:cs typeface="Arial" pitchFamily="34" charset="-120"/>
               </a:rPr>
-              <a:t>Grinnell Lake spur adds 1.8 mi round trip, almost flat.</a:t>
+              <a:t>The Grinnell Lake spur adds 1.8 mi round trip and is flat.</a:t>
             </a:r>
             <a:endParaRPr lang="en-US" sz="1100" dirty="0"/>
           </a:p>
@@ -6887,7 +6887,7 @@
                 <a:ea typeface="Arial" pitchFamily="34" charset="-122"/>
                 <a:cs typeface="Arial" pitchFamily="34" charset="-120"/>
               </a:rPr>
-              <a:t> (optional) skips 1.7 mi each way — ticketed.</a:t>
+              <a:t> (optional) saves 1.7 mi each way.</a:t>
             </a:r>
             <a:endParaRPr lang="en-US" sz="1150" dirty="0"/>
           </a:p>
@@ -7420,7 +7420,7 @@
                 <a:ea typeface="Arial" pitchFamily="34" charset="-122"/>
                 <a:cs typeface="Arial" pitchFamily="34" charset="-120"/>
               </a:rPr>
-              <a:t>Car sits at the Avalanche Creek lot. Arrive early — it fills before sunrise.</a:t>
+              <a:t>The car sits at the Avalanche Creek lot all day. Nothing to catch and nothing to book.</a:t>
             </a:r>
             <a:endParaRPr lang="en-US" sz="1150" dirty="0"/>
           </a:p>
@@ -7540,7 +7540,7 @@
                 <a:ea typeface="Arial" pitchFamily="34" charset="-122"/>
                 <a:cs typeface="Arial" pitchFamily="34" charset="-120"/>
               </a:rPr>
-              <a:t>Highline or Hidden Lake</a:t>
+              <a:t>Summit &amp; lakes groups</a:t>
             </a:r>
             <a:endParaRPr lang="en-US" sz="1600" dirty="0"/>
           </a:p>
@@ -8043,7 +8043,7 @@
                 <a:ea typeface="Arial" pitchFamily="34" charset="-122"/>
                 <a:cs typeface="Arial" pitchFamily="34" charset="-120"/>
               </a:rPr>
-              <a:t>Transfer at Avalanche both directions. The Highline finishes at The Loop, so check the last westbound departure before starting.</a:t>
+              <a:t>Transfer at Avalanche both directions. We should be long gone by then, but the summit group has to be down at The Loop before the last westbound bus.</a:t>
             </a:r>
             <a:endParaRPr lang="en-US" sz="1150" dirty="0"/>
           </a:p>
@@ -8466,7 +8466,7 @@
                 <a:ea typeface="Arial" pitchFamily="34" charset="-122"/>
                 <a:cs typeface="Arial" pitchFamily="34" charset="-120"/>
               </a:rPr>
-              <a:t>Optional ticketed boat across Swiftcurrent and Josephine skips 1.7 mi each way. Book ahead.</a:t>
+              <a:t>An optional boat across Swiftcurrent and Josephine saves 1.7 mi each way, in either direction or both.</a:t>
             </a:r>
             <a:endParaRPr lang="en-US" sz="1150" dirty="0"/>
           </a:p>

--- a/hikes/slides/glacier-hikes.pptx
+++ b/hikes/slides/glacier-hikes.pptx
@@ -771,7 +771,7 @@
           <a:p>
             <a:r>
               <a:rPr lang="en-US" dirty="0"/>
-              <a:t>Summit Group &amp; Lakes Group — two groups · both start at logan pass.</a:t>
+              <a:t>Highline &amp; Hidden Lake — two groups · both start at logan pass.</a:t>
             </a:r>
             <a:endParaRPr lang="en-US" dirty="0"/>
           </a:p>
@@ -1772,7 +1772,7 @@
                 <a:ea typeface="Arial" pitchFamily="34" charset="-122"/>
                 <a:cs typeface="Arial" pitchFamily="34" charset="-120"/>
               </a:rPr>
-              <a:t>Summit Group &amp; Lakes Group</a:t>
+              <a:t>Highline &amp; Hidden Lake</a:t>
             </a:r>
             <a:endParaRPr lang="en-US" sz="1350" dirty="0"/>
           </a:p>
@@ -2694,7 +2694,7 @@
                 <a:ea typeface="Arial" pitchFamily="34" charset="-122"/>
                 <a:cs typeface="Arial" pitchFamily="34" charset="-120"/>
               </a:rPr>
-              <a:t>Summit &amp; Lakes groups</a:t>
+              <a:t>Highline &amp; Hidden Lake</a:t>
             </a:r>
             <a:endParaRPr lang="en-US" sz="1800" dirty="0"/>
           </a:p>
@@ -4686,7 +4686,7 @@
                 <a:ea typeface="Arial" pitchFamily="34" charset="-122"/>
                 <a:cs typeface="Arial" pitchFamily="34" charset="-120"/>
               </a:rPr>
-              <a:t>Summit Group &amp; Lakes Group</a:t>
+              <a:t>Highline &amp; Hidden Lake</a:t>
             </a:r>
             <a:endParaRPr lang="en-US" sz="2800" dirty="0"/>
           </a:p>
@@ -5920,7 +5920,7 @@
                 <a:ea typeface="Arial" pitchFamily="34" charset="-122"/>
                 <a:cs typeface="Arial" pitchFamily="34" charset="-120"/>
               </a:rPr>
-              <a:t> — summit at The Loop, lakes at Logan Pass.</a:t>
+              <a:t> — summit at The Loop (last bus 7:30 pm), lakes at Logan Pass.</a:t>
             </a:r>
             <a:endParaRPr lang="en-US" sz="1150" dirty="0"/>
           </a:p>
@@ -7540,7 +7540,7 @@
                 <a:ea typeface="Arial" pitchFamily="34" charset="-122"/>
                 <a:cs typeface="Arial" pitchFamily="34" charset="-120"/>
               </a:rPr>
-              <a:t>Summit &amp; lakes groups</a:t>
+              <a:t>Highline &amp; Hidden Lake</a:t>
             </a:r>
             <a:endParaRPr lang="en-US" sz="1600" dirty="0"/>
           </a:p>
@@ -8043,7 +8043,7 @@
                 <a:ea typeface="Arial" pitchFamily="34" charset="-122"/>
                 <a:cs typeface="Arial" pitchFamily="34" charset="-120"/>
               </a:rPr>
-              <a:t>Transfer at Avalanche both directions. We should be long gone by then, but the summit group has to be down at The Loop before the last westbound bus.</a:t>
+              <a:t>Transfer at Avalanche both directions. We should be long gone by then, but the last bus out of The Loop is 7:30 pm — the summit group has to be down before it goes.</a:t>
             </a:r>
             <a:endParaRPr lang="en-US" sz="1150" dirty="0"/>
           </a:p>

--- a/hikes/slides/glacier-hikes.pptx
+++ b/hikes/slides/glacier-hikes.pptx
@@ -5682,7 +5682,7 @@
                 <a:ea typeface="Arial" pitchFamily="34" charset="-122"/>
                 <a:cs typeface="Arial" pitchFamily="34" charset="-120"/>
               </a:rPr>
-              <a:t>Bus from Apgar</a:t>
+              <a:t>Express shuttle to Logan Pass</a:t>
             </a:r>
             <a:pPr indent="0" marL="0">
               <a:buNone/>
@@ -5696,7 +5696,7 @@
                 <a:ea typeface="Arial" pitchFamily="34" charset="-122"/>
                 <a:cs typeface="Arial" pitchFamily="34" charset="-120"/>
               </a:rPr>
-              <a:t>, transferring at Avalanche Creek.</a:t>
+              <a:t> — direct, no stops on the way up.</a:t>
             </a:r>
             <a:endParaRPr lang="en-US" sz="1150" dirty="0"/>
           </a:p>
@@ -5794,7 +5794,7 @@
                 <a:ea typeface="Arial" pitchFamily="34" charset="-122"/>
                 <a:cs typeface="Arial" pitchFamily="34" charset="-120"/>
               </a:rPr>
-              <a:t>Shuttle to Logan Pass</a:t>
+              <a:t>Both groups get off there</a:t>
             </a:r>
             <a:pPr indent="0" marL="0">
               <a:buNone/>
@@ -5808,7 +5808,7 @@
                 <a:ea typeface="Arial" pitchFamily="34" charset="-122"/>
                 <a:cs typeface="Arial" pitchFamily="34" charset="-120"/>
               </a:rPr>
-              <a:t> — both groups start here and split.</a:t>
+              <a:t> and split at the visitor center.</a:t>
             </a:r>
             <a:endParaRPr lang="en-US" sz="1150" dirty="0"/>
           </a:p>
@@ -5906,7 +5906,7 @@
                 <a:ea typeface="Arial" pitchFamily="34" charset="-122"/>
                 <a:cs typeface="Arial" pitchFamily="34" charset="-120"/>
               </a:rPr>
-              <a:t>Shuttle back</a:t>
+              <a:t>Westbound shuttle back</a:t>
             </a:r>
             <a:pPr indent="0" marL="0">
               <a:buNone/>
@@ -7655,7 +7655,7 @@
         <p:spPr>
           <a:xfrm>
             <a:off x="6166714" y="3630168"/>
-            <a:ext cx="479146" cy="347472"/>
+            <a:ext cx="2571293" cy="347472"/>
           </a:xfrm>
           <a:prstGeom prst="roundRect">
             <a:avLst>
@@ -7677,7 +7677,7 @@
         <p:spPr>
           <a:xfrm>
             <a:off x="6166714" y="3630168"/>
-            <a:ext cx="479146" cy="347472"/>
+            <a:ext cx="2571293" cy="347472"/>
           </a:xfrm>
           <a:prstGeom prst="rect">
             <a:avLst/>
@@ -7701,7 +7701,7 @@
                 <a:ea typeface="Arial" pitchFamily="34" charset="-122"/>
                 <a:cs typeface="Arial" pitchFamily="34" charset="-120"/>
               </a:rPr>
-              <a:t>Bus</a:t>
+              <a:t>Express shuttle to Logan Pass</a:t>
             </a:r>
             <a:endParaRPr lang="en-US" sz="1000" dirty="0"/>
           </a:p>
@@ -7715,7 +7715,7 @@
         </p:nvSpPr>
         <p:spPr>
           <a:xfrm>
-            <a:off x="6645859" y="3630168"/>
+            <a:off x="8738006" y="3630168"/>
             <a:ext cx="219456" cy="347472"/>
           </a:xfrm>
           <a:prstGeom prst="rect">
@@ -7754,8 +7754,8 @@
         </p:nvSpPr>
         <p:spPr>
           <a:xfrm>
-            <a:off x="6865315" y="3630168"/>
-            <a:ext cx="1927555" cy="347472"/>
+            <a:off x="8957462" y="3630168"/>
+            <a:ext cx="559613" cy="347472"/>
           </a:xfrm>
           <a:prstGeom prst="roundRect">
             <a:avLst>
@@ -7763,7 +7763,7 @@
             </a:avLst>
           </a:prstGeom>
           <a:solidFill>
-            <a:srgbClr val="3D6EA5"/>
+            <a:srgbClr val="E2574C"/>
           </a:solidFill>
           <a:ln/>
         </p:spPr>
@@ -7776,8 +7776,8 @@
         </p:nvSpPr>
         <p:spPr>
           <a:xfrm>
-            <a:off x="6865315" y="3630168"/>
-            <a:ext cx="1927555" cy="347472"/>
+            <a:off x="8957462" y="3630168"/>
+            <a:ext cx="559613" cy="347472"/>
           </a:xfrm>
           <a:prstGeom prst="rect">
             <a:avLst/>
@@ -7801,7 +7801,7 @@
                 <a:ea typeface="Arial" pitchFamily="34" charset="-122"/>
                 <a:cs typeface="Arial" pitchFamily="34" charset="-120"/>
               </a:rPr>
-              <a:t>Shuttle to Logan Pass</a:t>
+              <a:t>Hike</a:t>
             </a:r>
             <a:endParaRPr lang="en-US" sz="1000" dirty="0"/>
           </a:p>
@@ -7815,7 +7815,7 @@
         </p:nvSpPr>
         <p:spPr>
           <a:xfrm>
-            <a:off x="8792870" y="3630168"/>
+            <a:off x="9517075" y="3630168"/>
             <a:ext cx="219456" cy="347472"/>
           </a:xfrm>
           <a:prstGeom prst="rect">
@@ -7854,8 +7854,8 @@
         </p:nvSpPr>
         <p:spPr>
           <a:xfrm>
-            <a:off x="9012326" y="3630168"/>
-            <a:ext cx="559613" cy="347472"/>
+            <a:off x="9736531" y="3630168"/>
+            <a:ext cx="1203350" cy="347472"/>
           </a:xfrm>
           <a:prstGeom prst="roundRect">
             <a:avLst>
@@ -7863,6 +7863,129 @@
             </a:avLst>
           </a:prstGeom>
           <a:solidFill>
+            <a:srgbClr val="3D6EA5"/>
+          </a:solidFill>
+          <a:ln/>
+        </p:spPr>
+      </p:sp>
+      <p:sp>
+        <p:nvSpPr>
+          <p:cNvPr id="31" name="Text 29"/>
+          <p:cNvSpPr/>
+          <p:nvPr/>
+        </p:nvSpPr>
+        <p:spPr>
+          <a:xfrm>
+            <a:off x="9736531" y="3630168"/>
+            <a:ext cx="1203350" cy="347472"/>
+          </a:xfrm>
+          <a:prstGeom prst="rect">
+            <a:avLst/>
+          </a:prstGeom>
+          <a:noFill/>
+          <a:ln/>
+        </p:spPr>
+        <p:txBody>
+          <a:bodyPr wrap="square" lIns="0" tIns="0" rIns="0" bIns="0" rtlCol="0" anchor="ctr"/>
+          <a:lstStyle/>
+          <a:p>
+            <a:pPr algn="ctr" indent="0" marL="0">
+              <a:buNone/>
+            </a:pPr>
+            <a:r>
+              <a:rPr lang="en-US" sz="1000" b="1" dirty="0">
+                <a:solidFill>
+                  <a:srgbClr val="FFFFFF"/>
+                </a:solidFill>
+                <a:latin typeface="Arial" pitchFamily="34" charset="0"/>
+                <a:ea typeface="Arial" pitchFamily="34" charset="-122"/>
+                <a:cs typeface="Arial" pitchFamily="34" charset="-120"/>
+              </a:rPr>
+              <a:t>Shuttle back</a:t>
+            </a:r>
+            <a:endParaRPr lang="en-US" sz="1000" dirty="0"/>
+          </a:p>
+        </p:txBody>
+      </p:sp>
+      <p:sp>
+        <p:nvSpPr>
+          <p:cNvPr id="32" name="Text 30"/>
+          <p:cNvSpPr/>
+          <p:nvPr/>
+        </p:nvSpPr>
+        <p:spPr>
+          <a:xfrm>
+            <a:off x="1371600" y="4105656"/>
+            <a:ext cx="9997135" cy="512064"/>
+          </a:xfrm>
+          <a:prstGeom prst="rect">
+            <a:avLst/>
+          </a:prstGeom>
+          <a:noFill/>
+          <a:ln/>
+        </p:spPr>
+        <p:txBody>
+          <a:bodyPr wrap="square" lIns="0" tIns="0" rIns="0" bIns="0" rtlCol="0" anchor="t"/>
+          <a:lstStyle/>
+          <a:p>
+            <a:pPr indent="0" marL="0">
+              <a:lnSpc>
+                <a:spcPts val="1500"/>
+              </a:lnSpc>
+              <a:buNone/>
+            </a:pPr>
+            <a:r>
+              <a:rPr lang="en-US" sz="1150" dirty="0">
+                <a:solidFill>
+                  <a:srgbClr val="A9A296"/>
+                </a:solidFill>
+                <a:latin typeface="Arial" pitchFamily="34" charset="0"/>
+                <a:ea typeface="Arial" pitchFamily="34" charset="-122"/>
+                <a:cs typeface="Arial" pitchFamily="34" charset="-120"/>
+              </a:rPr>
+              <a:t>The Apgar shuttle runs express to Logan Pass, no stops on the way up. We should be long gone by then, but the last bus out of The Loop is 7:30 pm and the summit group has to be down before it goes.</a:t>
+            </a:r>
+            <a:endParaRPr lang="en-US" sz="1150" dirty="0"/>
+          </a:p>
+        </p:txBody>
+      </p:sp>
+      <p:sp>
+        <p:nvSpPr>
+          <p:cNvPr id="33" name="Shape 31"/>
+          <p:cNvSpPr/>
+          <p:nvPr/>
+        </p:nvSpPr>
+        <p:spPr>
+          <a:xfrm>
+            <a:off x="640080" y="4928616"/>
+            <a:ext cx="10911535" cy="1426464"/>
+          </a:xfrm>
+          <a:prstGeom prst="roundRect">
+            <a:avLst>
+              <a:gd name="adj" fmla="val 3205"/>
+            </a:avLst>
+          </a:prstGeom>
+          <a:solidFill>
+            <a:srgbClr val="2E2B27"/>
+          </a:solidFill>
+          <a:ln/>
+        </p:spPr>
+      </p:sp>
+      <p:sp>
+        <p:nvSpPr>
+          <p:cNvPr id="34" name="Shape 32"/>
+          <p:cNvSpPr/>
+          <p:nvPr/>
+        </p:nvSpPr>
+        <p:spPr>
+          <a:xfrm>
+            <a:off x="914400" y="5202936"/>
+            <a:ext cx="347472" cy="347472"/>
+          </a:xfrm>
+          <a:prstGeom prst="ellipse">
+            <a:avLst/>
+          </a:prstGeom>
+          <a:solidFill>
             <a:srgbClr val="E2574C"/>
           </a:solidFill>
           <a:ln/>
@@ -7870,14 +7993,14 @@
       </p:sp>
       <p:sp>
         <p:nvSpPr>
-          <p:cNvPr id="31" name="Text 29"/>
-          <p:cNvSpPr/>
-          <p:nvPr/>
-        </p:nvSpPr>
-        <p:spPr>
-          <a:xfrm>
-            <a:off x="9012326" y="3630168"/>
-            <a:ext cx="559613" cy="347472"/>
+          <p:cNvPr id="35" name="Text 33"/>
+          <p:cNvSpPr/>
+          <p:nvPr/>
+        </p:nvSpPr>
+        <p:spPr>
+          <a:xfrm>
+            <a:off x="914400" y="5202936"/>
+            <a:ext cx="347472" cy="347472"/>
           </a:xfrm>
           <a:prstGeom prst="rect">
             <a:avLst/>
@@ -7893,7 +8016,7 @@
               <a:buNone/>
             </a:pPr>
             <a:r>
-              <a:rPr lang="en-US" sz="1000" b="1" dirty="0">
+              <a:rPr lang="en-US" sz="1300" b="1" dirty="0">
                 <a:solidFill>
                   <a:srgbClr val="FFFFFF"/>
                 </a:solidFill>
@@ -7901,46 +8024,7 @@
                 <a:ea typeface="Arial" pitchFamily="34" charset="-122"/>
                 <a:cs typeface="Arial" pitchFamily="34" charset="-120"/>
               </a:rPr>
-              <a:t>Hike</a:t>
-            </a:r>
-            <a:endParaRPr lang="en-US" sz="1000" dirty="0"/>
-          </a:p>
-        </p:txBody>
-      </p:sp>
-      <p:sp>
-        <p:nvSpPr>
-          <p:cNvPr id="32" name="Text 30"/>
-          <p:cNvSpPr/>
-          <p:nvPr/>
-        </p:nvSpPr>
-        <p:spPr>
-          <a:xfrm>
-            <a:off x="9571939" y="3630168"/>
-            <a:ext cx="219456" cy="347472"/>
-          </a:xfrm>
-          <a:prstGeom prst="rect">
-            <a:avLst/>
-          </a:prstGeom>
-          <a:noFill/>
-          <a:ln/>
-        </p:spPr>
-        <p:txBody>
-          <a:bodyPr wrap="square" lIns="0" tIns="0" rIns="0" bIns="0" rtlCol="0" anchor="ctr"/>
-          <a:lstStyle/>
-          <a:p>
-            <a:pPr algn="ctr" indent="0" marL="0">
-              <a:buNone/>
-            </a:pPr>
-            <a:r>
-              <a:rPr lang="en-US" sz="1300" b="1" dirty="0">
-                <a:solidFill>
-                  <a:srgbClr val="9A948A"/>
-                </a:solidFill>
-                <a:latin typeface="Arial" pitchFamily="34" charset="0"/>
-                <a:ea typeface="Arial" pitchFamily="34" charset="-122"/>
-                <a:cs typeface="Arial" pitchFamily="34" charset="-120"/>
-              </a:rPr>
-              <a:t>›</a:t>
+              <a:t>3</a:t>
             </a:r>
             <a:endParaRPr lang="en-US" sz="1300" dirty="0"/>
           </a:p>
@@ -7948,14 +8032,53 @@
       </p:sp>
       <p:sp>
         <p:nvSpPr>
-          <p:cNvPr id="33" name="Shape 31"/>
-          <p:cNvSpPr/>
-          <p:nvPr/>
-        </p:nvSpPr>
-        <p:spPr>
-          <a:xfrm>
-            <a:off x="9791395" y="3630168"/>
-            <a:ext cx="1203350" cy="347472"/>
+          <p:cNvPr id="36" name="Text 34"/>
+          <p:cNvSpPr/>
+          <p:nvPr/>
+        </p:nvSpPr>
+        <p:spPr>
+          <a:xfrm>
+            <a:off x="1371600" y="5166360"/>
+            <a:ext cx="3200400" cy="420624"/>
+          </a:xfrm>
+          <a:prstGeom prst="rect">
+            <a:avLst/>
+          </a:prstGeom>
+          <a:noFill/>
+          <a:ln/>
+        </p:spPr>
+        <p:txBody>
+          <a:bodyPr wrap="square" lIns="0" tIns="0" rIns="0" bIns="0" rtlCol="0" anchor="ctr"/>
+          <a:lstStyle/>
+          <a:p>
+            <a:pPr indent="0" marL="0">
+              <a:buNone/>
+            </a:pPr>
+            <a:r>
+              <a:rPr lang="en-US" sz="1600" b="1" dirty="0">
+                <a:solidFill>
+                  <a:srgbClr val="F4F1EA"/>
+                </a:solidFill>
+                <a:latin typeface="Arial" pitchFamily="34" charset="0"/>
+                <a:ea typeface="Arial" pitchFamily="34" charset="-122"/>
+                <a:cs typeface="Arial" pitchFamily="34" charset="-120"/>
+              </a:rPr>
+              <a:t>Grinnell Glacier</a:t>
+            </a:r>
+            <a:endParaRPr lang="en-US" sz="1600" dirty="0"/>
+          </a:p>
+        </p:txBody>
+      </p:sp>
+      <p:sp>
+        <p:nvSpPr>
+          <p:cNvPr id="37" name="Shape 35"/>
+          <p:cNvSpPr/>
+          <p:nvPr/>
+        </p:nvSpPr>
+        <p:spPr>
+          <a:xfrm>
+            <a:off x="4663440" y="5202936"/>
+            <a:ext cx="640080" cy="347472"/>
           </a:xfrm>
           <a:prstGeom prst="roundRect">
             <a:avLst>
@@ -7963,215 +8086,14 @@
             </a:avLst>
           </a:prstGeom>
           <a:solidFill>
-            <a:srgbClr val="3D6EA5"/>
+            <a:srgbClr val="6E7B52"/>
           </a:solidFill>
           <a:ln/>
         </p:spPr>
       </p:sp>
       <p:sp>
         <p:nvSpPr>
-          <p:cNvPr id="34" name="Text 32"/>
-          <p:cNvSpPr/>
-          <p:nvPr/>
-        </p:nvSpPr>
-        <p:spPr>
-          <a:xfrm>
-            <a:off x="9791395" y="3630168"/>
-            <a:ext cx="1203350" cy="347472"/>
-          </a:xfrm>
-          <a:prstGeom prst="rect">
-            <a:avLst/>
-          </a:prstGeom>
-          <a:noFill/>
-          <a:ln/>
-        </p:spPr>
-        <p:txBody>
-          <a:bodyPr wrap="square" lIns="0" tIns="0" rIns="0" bIns="0" rtlCol="0" anchor="ctr"/>
-          <a:lstStyle/>
-          <a:p>
-            <a:pPr algn="ctr" indent="0" marL="0">
-              <a:buNone/>
-            </a:pPr>
-            <a:r>
-              <a:rPr lang="en-US" sz="1000" b="1" dirty="0">
-                <a:solidFill>
-                  <a:srgbClr val="FFFFFF"/>
-                </a:solidFill>
-                <a:latin typeface="Arial" pitchFamily="34" charset="0"/>
-                <a:ea typeface="Arial" pitchFamily="34" charset="-122"/>
-                <a:cs typeface="Arial" pitchFamily="34" charset="-120"/>
-              </a:rPr>
-              <a:t>Shuttle back</a:t>
-            </a:r>
-            <a:endParaRPr lang="en-US" sz="1000" dirty="0"/>
-          </a:p>
-        </p:txBody>
-      </p:sp>
-      <p:sp>
-        <p:nvSpPr>
-          <p:cNvPr id="35" name="Text 33"/>
-          <p:cNvSpPr/>
-          <p:nvPr/>
-        </p:nvSpPr>
-        <p:spPr>
-          <a:xfrm>
-            <a:off x="1371600" y="4105656"/>
-            <a:ext cx="9997135" cy="512064"/>
-          </a:xfrm>
-          <a:prstGeom prst="rect">
-            <a:avLst/>
-          </a:prstGeom>
-          <a:noFill/>
-          <a:ln/>
-        </p:spPr>
-        <p:txBody>
-          <a:bodyPr wrap="square" lIns="0" tIns="0" rIns="0" bIns="0" rtlCol="0" anchor="t"/>
-          <a:lstStyle/>
-          <a:p>
-            <a:pPr indent="0" marL="0">
-              <a:lnSpc>
-                <a:spcPts val="1500"/>
-              </a:lnSpc>
-              <a:buNone/>
-            </a:pPr>
-            <a:r>
-              <a:rPr lang="en-US" sz="1150" dirty="0">
-                <a:solidFill>
-                  <a:srgbClr val="A9A296"/>
-                </a:solidFill>
-                <a:latin typeface="Arial" pitchFamily="34" charset="0"/>
-                <a:ea typeface="Arial" pitchFamily="34" charset="-122"/>
-                <a:cs typeface="Arial" pitchFamily="34" charset="-120"/>
-              </a:rPr>
-              <a:t>Transfer at Avalanche both directions. We should be long gone by then, but the last bus out of The Loop is 7:30 pm — the summit group has to be down before it goes.</a:t>
-            </a:r>
-            <a:endParaRPr lang="en-US" sz="1150" dirty="0"/>
-          </a:p>
-        </p:txBody>
-      </p:sp>
-      <p:sp>
-        <p:nvSpPr>
-          <p:cNvPr id="36" name="Shape 34"/>
-          <p:cNvSpPr/>
-          <p:nvPr/>
-        </p:nvSpPr>
-        <p:spPr>
-          <a:xfrm>
-            <a:off x="640080" y="4928616"/>
-            <a:ext cx="10911535" cy="1426464"/>
-          </a:xfrm>
-          <a:prstGeom prst="roundRect">
-            <a:avLst>
-              <a:gd name="adj" fmla="val 3205"/>
-            </a:avLst>
-          </a:prstGeom>
-          <a:solidFill>
-            <a:srgbClr val="2E2B27"/>
-          </a:solidFill>
-          <a:ln/>
-        </p:spPr>
-      </p:sp>
-      <p:sp>
-        <p:nvSpPr>
-          <p:cNvPr id="37" name="Shape 35"/>
-          <p:cNvSpPr/>
-          <p:nvPr/>
-        </p:nvSpPr>
-        <p:spPr>
-          <a:xfrm>
-            <a:off x="914400" y="5202936"/>
-            <a:ext cx="347472" cy="347472"/>
-          </a:xfrm>
-          <a:prstGeom prst="ellipse">
-            <a:avLst/>
-          </a:prstGeom>
-          <a:solidFill>
-            <a:srgbClr val="E2574C"/>
-          </a:solidFill>
-          <a:ln/>
-        </p:spPr>
-      </p:sp>
-      <p:sp>
-        <p:nvSpPr>
           <p:cNvPr id="38" name="Text 36"/>
-          <p:cNvSpPr/>
-          <p:nvPr/>
-        </p:nvSpPr>
-        <p:spPr>
-          <a:xfrm>
-            <a:off x="914400" y="5202936"/>
-            <a:ext cx="347472" cy="347472"/>
-          </a:xfrm>
-          <a:prstGeom prst="rect">
-            <a:avLst/>
-          </a:prstGeom>
-          <a:noFill/>
-          <a:ln/>
-        </p:spPr>
-        <p:txBody>
-          <a:bodyPr wrap="square" lIns="0" tIns="0" rIns="0" bIns="0" rtlCol="0" anchor="ctr"/>
-          <a:lstStyle/>
-          <a:p>
-            <a:pPr algn="ctr" indent="0" marL="0">
-              <a:buNone/>
-            </a:pPr>
-            <a:r>
-              <a:rPr lang="en-US" sz="1300" b="1" dirty="0">
-                <a:solidFill>
-                  <a:srgbClr val="FFFFFF"/>
-                </a:solidFill>
-                <a:latin typeface="Arial" pitchFamily="34" charset="0"/>
-                <a:ea typeface="Arial" pitchFamily="34" charset="-122"/>
-                <a:cs typeface="Arial" pitchFamily="34" charset="-120"/>
-              </a:rPr>
-              <a:t>3</a:t>
-            </a:r>
-            <a:endParaRPr lang="en-US" sz="1300" dirty="0"/>
-          </a:p>
-        </p:txBody>
-      </p:sp>
-      <p:sp>
-        <p:nvSpPr>
-          <p:cNvPr id="39" name="Text 37"/>
-          <p:cNvSpPr/>
-          <p:nvPr/>
-        </p:nvSpPr>
-        <p:spPr>
-          <a:xfrm>
-            <a:off x="1371600" y="5166360"/>
-            <a:ext cx="3200400" cy="420624"/>
-          </a:xfrm>
-          <a:prstGeom prst="rect">
-            <a:avLst/>
-          </a:prstGeom>
-          <a:noFill/>
-          <a:ln/>
-        </p:spPr>
-        <p:txBody>
-          <a:bodyPr wrap="square" lIns="0" tIns="0" rIns="0" bIns="0" rtlCol="0" anchor="ctr"/>
-          <a:lstStyle/>
-          <a:p>
-            <a:pPr indent="0" marL="0">
-              <a:buNone/>
-            </a:pPr>
-            <a:r>
-              <a:rPr lang="en-US" sz="1600" b="1" dirty="0">
-                <a:solidFill>
-                  <a:srgbClr val="F4F1EA"/>
-                </a:solidFill>
-                <a:latin typeface="Arial" pitchFamily="34" charset="0"/>
-                <a:ea typeface="Arial" pitchFamily="34" charset="-122"/>
-                <a:cs typeface="Arial" pitchFamily="34" charset="-120"/>
-              </a:rPr>
-              <a:t>Grinnell Glacier</a:t>
-            </a:r>
-            <a:endParaRPr lang="en-US" sz="1600" dirty="0"/>
-          </a:p>
-        </p:txBody>
-      </p:sp>
-      <p:sp>
-        <p:nvSpPr>
-          <p:cNvPr id="40" name="Shape 38"/>
           <p:cNvSpPr/>
           <p:nvPr/>
         </p:nvSpPr>
@@ -8179,6 +8101,84 @@
           <a:xfrm>
             <a:off x="4663440" y="5202936"/>
             <a:ext cx="640080" cy="347472"/>
+          </a:xfrm>
+          <a:prstGeom prst="rect">
+            <a:avLst/>
+          </a:prstGeom>
+          <a:noFill/>
+          <a:ln/>
+        </p:spPr>
+        <p:txBody>
+          <a:bodyPr wrap="square" lIns="0" tIns="0" rIns="0" bIns="0" rtlCol="0" anchor="ctr"/>
+          <a:lstStyle/>
+          <a:p>
+            <a:pPr algn="ctr" indent="0" marL="0">
+              <a:buNone/>
+            </a:pPr>
+            <a:r>
+              <a:rPr lang="en-US" sz="1000" b="1" dirty="0">
+                <a:solidFill>
+                  <a:srgbClr val="FFFFFF"/>
+                </a:solidFill>
+                <a:latin typeface="Arial" pitchFamily="34" charset="0"/>
+                <a:ea typeface="Arial" pitchFamily="34" charset="-122"/>
+                <a:cs typeface="Arial" pitchFamily="34" charset="-120"/>
+              </a:rPr>
+              <a:t>Drive</a:t>
+            </a:r>
+            <a:endParaRPr lang="en-US" sz="1000" dirty="0"/>
+          </a:p>
+        </p:txBody>
+      </p:sp>
+      <p:sp>
+        <p:nvSpPr>
+          <p:cNvPr id="39" name="Text 37"/>
+          <p:cNvSpPr/>
+          <p:nvPr/>
+        </p:nvSpPr>
+        <p:spPr>
+          <a:xfrm>
+            <a:off x="5303520" y="5202936"/>
+            <a:ext cx="219456" cy="347472"/>
+          </a:xfrm>
+          <a:prstGeom prst="rect">
+            <a:avLst/>
+          </a:prstGeom>
+          <a:noFill/>
+          <a:ln/>
+        </p:spPr>
+        <p:txBody>
+          <a:bodyPr wrap="square" lIns="0" tIns="0" rIns="0" bIns="0" rtlCol="0" anchor="ctr"/>
+          <a:lstStyle/>
+          <a:p>
+            <a:pPr algn="ctr" indent="0" marL="0">
+              <a:buNone/>
+            </a:pPr>
+            <a:r>
+              <a:rPr lang="en-US" sz="1300" b="1" dirty="0">
+                <a:solidFill>
+                  <a:srgbClr val="9A948A"/>
+                </a:solidFill>
+                <a:latin typeface="Arial" pitchFamily="34" charset="0"/>
+                <a:ea typeface="Arial" pitchFamily="34" charset="-122"/>
+                <a:cs typeface="Arial" pitchFamily="34" charset="-120"/>
+              </a:rPr>
+              <a:t>›</a:t>
+            </a:r>
+            <a:endParaRPr lang="en-US" sz="1300" dirty="0"/>
+          </a:p>
+        </p:txBody>
+      </p:sp>
+      <p:sp>
+        <p:nvSpPr>
+          <p:cNvPr id="40" name="Shape 38"/>
+          <p:cNvSpPr/>
+          <p:nvPr/>
+        </p:nvSpPr>
+        <p:spPr>
+          <a:xfrm>
+            <a:off x="5522976" y="5202936"/>
+            <a:ext cx="1444752" cy="347472"/>
           </a:xfrm>
           <a:prstGeom prst="roundRect">
             <a:avLst>
@@ -8186,7 +8186,7 @@
             </a:avLst>
           </a:prstGeom>
           <a:solidFill>
-            <a:srgbClr val="6E7B52"/>
+            <a:srgbClr val="E2574C"/>
           </a:solidFill>
           <a:ln/>
         </p:spPr>
@@ -8194,84 +8194,6 @@
       <p:sp>
         <p:nvSpPr>
           <p:cNvPr id="41" name="Text 39"/>
-          <p:cNvSpPr/>
-          <p:nvPr/>
-        </p:nvSpPr>
-        <p:spPr>
-          <a:xfrm>
-            <a:off x="4663440" y="5202936"/>
-            <a:ext cx="640080" cy="347472"/>
-          </a:xfrm>
-          <a:prstGeom prst="rect">
-            <a:avLst/>
-          </a:prstGeom>
-          <a:noFill/>
-          <a:ln/>
-        </p:spPr>
-        <p:txBody>
-          <a:bodyPr wrap="square" lIns="0" tIns="0" rIns="0" bIns="0" rtlCol="0" anchor="ctr"/>
-          <a:lstStyle/>
-          <a:p>
-            <a:pPr algn="ctr" indent="0" marL="0">
-              <a:buNone/>
-            </a:pPr>
-            <a:r>
-              <a:rPr lang="en-US" sz="1000" b="1" dirty="0">
-                <a:solidFill>
-                  <a:srgbClr val="FFFFFF"/>
-                </a:solidFill>
-                <a:latin typeface="Arial" pitchFamily="34" charset="0"/>
-                <a:ea typeface="Arial" pitchFamily="34" charset="-122"/>
-                <a:cs typeface="Arial" pitchFamily="34" charset="-120"/>
-              </a:rPr>
-              <a:t>Drive</a:t>
-            </a:r>
-            <a:endParaRPr lang="en-US" sz="1000" dirty="0"/>
-          </a:p>
-        </p:txBody>
-      </p:sp>
-      <p:sp>
-        <p:nvSpPr>
-          <p:cNvPr id="42" name="Text 40"/>
-          <p:cNvSpPr/>
-          <p:nvPr/>
-        </p:nvSpPr>
-        <p:spPr>
-          <a:xfrm>
-            <a:off x="5303520" y="5202936"/>
-            <a:ext cx="219456" cy="347472"/>
-          </a:xfrm>
-          <a:prstGeom prst="rect">
-            <a:avLst/>
-          </a:prstGeom>
-          <a:noFill/>
-          <a:ln/>
-        </p:spPr>
-        <p:txBody>
-          <a:bodyPr wrap="square" lIns="0" tIns="0" rIns="0" bIns="0" rtlCol="0" anchor="ctr"/>
-          <a:lstStyle/>
-          <a:p>
-            <a:pPr algn="ctr" indent="0" marL="0">
-              <a:buNone/>
-            </a:pPr>
-            <a:r>
-              <a:rPr lang="en-US" sz="1300" b="1" dirty="0">
-                <a:solidFill>
-                  <a:srgbClr val="9A948A"/>
-                </a:solidFill>
-                <a:latin typeface="Arial" pitchFamily="34" charset="0"/>
-                <a:ea typeface="Arial" pitchFamily="34" charset="-122"/>
-                <a:cs typeface="Arial" pitchFamily="34" charset="-120"/>
-              </a:rPr>
-              <a:t>›</a:t>
-            </a:r>
-            <a:endParaRPr lang="en-US" sz="1300" dirty="0"/>
-          </a:p>
-        </p:txBody>
-      </p:sp>
-      <p:sp>
-        <p:nvSpPr>
-          <p:cNvPr id="43" name="Shape 41"/>
           <p:cNvSpPr/>
           <p:nvPr/>
         </p:nvSpPr>
@@ -8279,6 +8201,84 @@
           <a:xfrm>
             <a:off x="5522976" y="5202936"/>
             <a:ext cx="1444752" cy="347472"/>
+          </a:xfrm>
+          <a:prstGeom prst="rect">
+            <a:avLst/>
+          </a:prstGeom>
+          <a:noFill/>
+          <a:ln/>
+        </p:spPr>
+        <p:txBody>
+          <a:bodyPr wrap="square" lIns="0" tIns="0" rIns="0" bIns="0" rtlCol="0" anchor="ctr"/>
+          <a:lstStyle/>
+          <a:p>
+            <a:pPr algn="ctr" indent="0" marL="0">
+              <a:buNone/>
+            </a:pPr>
+            <a:r>
+              <a:rPr lang="en-US" sz="1000" b="1" dirty="0">
+                <a:solidFill>
+                  <a:srgbClr val="FFFFFF"/>
+                </a:solidFill>
+                <a:latin typeface="Arial" pitchFamily="34" charset="0"/>
+                <a:ea typeface="Arial" pitchFamily="34" charset="-122"/>
+                <a:cs typeface="Arial" pitchFamily="34" charset="-120"/>
+              </a:rPr>
+              <a:t>Hike out &amp; back</a:t>
+            </a:r>
+            <a:endParaRPr lang="en-US" sz="1000" dirty="0"/>
+          </a:p>
+        </p:txBody>
+      </p:sp>
+      <p:sp>
+        <p:nvSpPr>
+          <p:cNvPr id="42" name="Text 40"/>
+          <p:cNvSpPr/>
+          <p:nvPr/>
+        </p:nvSpPr>
+        <p:spPr>
+          <a:xfrm>
+            <a:off x="6967728" y="5202936"/>
+            <a:ext cx="219456" cy="347472"/>
+          </a:xfrm>
+          <a:prstGeom prst="rect">
+            <a:avLst/>
+          </a:prstGeom>
+          <a:noFill/>
+          <a:ln/>
+        </p:spPr>
+        <p:txBody>
+          <a:bodyPr wrap="square" lIns="0" tIns="0" rIns="0" bIns="0" rtlCol="0" anchor="ctr"/>
+          <a:lstStyle/>
+          <a:p>
+            <a:pPr algn="ctr" indent="0" marL="0">
+              <a:buNone/>
+            </a:pPr>
+            <a:r>
+              <a:rPr lang="en-US" sz="1300" b="1" dirty="0">
+                <a:solidFill>
+                  <a:srgbClr val="9A948A"/>
+                </a:solidFill>
+                <a:latin typeface="Arial" pitchFamily="34" charset="0"/>
+                <a:ea typeface="Arial" pitchFamily="34" charset="-122"/>
+                <a:cs typeface="Arial" pitchFamily="34" charset="-120"/>
+              </a:rPr>
+              <a:t>›</a:t>
+            </a:r>
+            <a:endParaRPr lang="en-US" sz="1300" dirty="0"/>
+          </a:p>
+        </p:txBody>
+      </p:sp>
+      <p:sp>
+        <p:nvSpPr>
+          <p:cNvPr id="43" name="Shape 41"/>
+          <p:cNvSpPr/>
+          <p:nvPr/>
+        </p:nvSpPr>
+        <p:spPr>
+          <a:xfrm>
+            <a:off x="7187184" y="5202936"/>
+            <a:ext cx="640080" cy="347472"/>
           </a:xfrm>
           <a:prstGeom prst="roundRect">
             <a:avLst>
@@ -8286,7 +8286,7 @@
             </a:avLst>
           </a:prstGeom>
           <a:solidFill>
-            <a:srgbClr val="E2574C"/>
+            <a:srgbClr val="6E7B52"/>
           </a:solidFill>
           <a:ln/>
         </p:spPr>
@@ -8294,84 +8294,6 @@
       <p:sp>
         <p:nvSpPr>
           <p:cNvPr id="44" name="Text 42"/>
-          <p:cNvSpPr/>
-          <p:nvPr/>
-        </p:nvSpPr>
-        <p:spPr>
-          <a:xfrm>
-            <a:off x="5522976" y="5202936"/>
-            <a:ext cx="1444752" cy="347472"/>
-          </a:xfrm>
-          <a:prstGeom prst="rect">
-            <a:avLst/>
-          </a:prstGeom>
-          <a:noFill/>
-          <a:ln/>
-        </p:spPr>
-        <p:txBody>
-          <a:bodyPr wrap="square" lIns="0" tIns="0" rIns="0" bIns="0" rtlCol="0" anchor="ctr"/>
-          <a:lstStyle/>
-          <a:p>
-            <a:pPr algn="ctr" indent="0" marL="0">
-              <a:buNone/>
-            </a:pPr>
-            <a:r>
-              <a:rPr lang="en-US" sz="1000" b="1" dirty="0">
-                <a:solidFill>
-                  <a:srgbClr val="FFFFFF"/>
-                </a:solidFill>
-                <a:latin typeface="Arial" pitchFamily="34" charset="0"/>
-                <a:ea typeface="Arial" pitchFamily="34" charset="-122"/>
-                <a:cs typeface="Arial" pitchFamily="34" charset="-120"/>
-              </a:rPr>
-              <a:t>Hike out &amp; back</a:t>
-            </a:r>
-            <a:endParaRPr lang="en-US" sz="1000" dirty="0"/>
-          </a:p>
-        </p:txBody>
-      </p:sp>
-      <p:sp>
-        <p:nvSpPr>
-          <p:cNvPr id="45" name="Text 43"/>
-          <p:cNvSpPr/>
-          <p:nvPr/>
-        </p:nvSpPr>
-        <p:spPr>
-          <a:xfrm>
-            <a:off x="6967728" y="5202936"/>
-            <a:ext cx="219456" cy="347472"/>
-          </a:xfrm>
-          <a:prstGeom prst="rect">
-            <a:avLst/>
-          </a:prstGeom>
-          <a:noFill/>
-          <a:ln/>
-        </p:spPr>
-        <p:txBody>
-          <a:bodyPr wrap="square" lIns="0" tIns="0" rIns="0" bIns="0" rtlCol="0" anchor="ctr"/>
-          <a:lstStyle/>
-          <a:p>
-            <a:pPr algn="ctr" indent="0" marL="0">
-              <a:buNone/>
-            </a:pPr>
-            <a:r>
-              <a:rPr lang="en-US" sz="1300" b="1" dirty="0">
-                <a:solidFill>
-                  <a:srgbClr val="9A948A"/>
-                </a:solidFill>
-                <a:latin typeface="Arial" pitchFamily="34" charset="0"/>
-                <a:ea typeface="Arial" pitchFamily="34" charset="-122"/>
-                <a:cs typeface="Arial" pitchFamily="34" charset="-120"/>
-              </a:rPr>
-              <a:t>›</a:t>
-            </a:r>
-            <a:endParaRPr lang="en-US" sz="1300" dirty="0"/>
-          </a:p>
-        </p:txBody>
-      </p:sp>
-      <p:sp>
-        <p:nvSpPr>
-          <p:cNvPr id="46" name="Shape 44"/>
           <p:cNvSpPr/>
           <p:nvPr/>
         </p:nvSpPr>
@@ -8380,28 +8302,6 @@
             <a:off x="7187184" y="5202936"/>
             <a:ext cx="640080" cy="347472"/>
           </a:xfrm>
-          <a:prstGeom prst="roundRect">
-            <a:avLst>
-              <a:gd name="adj" fmla="val 50000"/>
-            </a:avLst>
-          </a:prstGeom>
-          <a:solidFill>
-            <a:srgbClr val="6E7B52"/>
-          </a:solidFill>
-          <a:ln/>
-        </p:spPr>
-      </p:sp>
-      <p:sp>
-        <p:nvSpPr>
-          <p:cNvPr id="47" name="Text 45"/>
-          <p:cNvSpPr/>
-          <p:nvPr/>
-        </p:nvSpPr>
-        <p:spPr>
-          <a:xfrm>
-            <a:off x="7187184" y="5202936"/>
-            <a:ext cx="640080" cy="347472"/>
-          </a:xfrm>
           <a:prstGeom prst="rect">
             <a:avLst/>
           </a:prstGeom>
@@ -8432,7 +8332,7 @@
       </p:sp>
       <p:sp>
         <p:nvSpPr>
-          <p:cNvPr id="48" name="Text 46"/>
+          <p:cNvPr id="45" name="Text 43"/>
           <p:cNvSpPr/>
           <p:nvPr/>
         </p:nvSpPr>
